--- a/decks/englit-gothic/englit-gothic_ch6_planning-and-assessment.pptx
+++ b/decks/englit-gothic/englit-gothic_ch6_planning-and-assessment.pptx
@@ -126,29 +126,29 @@
   <p:extLst>
     <p:ext uri="{521415D9-36F7-43E2-AB2F-B90AF26B5E84}">
       <p14:sectionLst xmlns:p14="http://schemas.microsoft.com/office/powerpoint/2010/main">
-        <p14:section name="Opening" id="{e2ef75ff-84bc-c048-4cd8-27c714a9600b}">
+        <p14:section name="Opening" id="{5d0bd56a-423f-652d-60e7-70dca681fd76}">
           <p14:sldIdLst>
             <p14:sldId id="256"/>
           </p14:sldIdLst>
         </p14:section>
-        <p14:section name="Gate" id="{ff89ff2e-80b8-8034-1807-f8c6761d3ff5}">
+        <p14:section name="Gate" id="{b4d3a83a-86e3-5d0a-cbb9-e643b10e0e98}">
           <p14:sldIdLst>
             <p14:sldId id="257"/>
             <p14:sldId id="258"/>
           </p14:sldIdLst>
         </p14:section>
-        <p14:section name="Pre-teach" id="{dbb528e4-ad03-0779-c2c6-66c735e04ae4}">
+        <p14:section name="Pre-teach" id="{07a07f03-9947-05ed-6037-95e326befc72}">
           <p14:sldIdLst>
             <p14:sldId id="259"/>
           </p14:sldIdLst>
         </p14:section>
-        <p14:section name="Read-along" id="{5e6fde45-855a-2500-06a4-77c802294641}">
+        <p14:section name="Read-along" id="{a470e88c-fb2b-5f69-7980-17862ed2fc45}">
           <p14:sldIdLst>
             <p14:sldId id="260"/>
             <p14:sldId id="261"/>
           </p14:sldIdLst>
         </p14:section>
-        <p14:section name="Teach" id="{b255d7f6-0580-851a-ae37-10d453c0a8f6}">
+        <p14:section name="Teach" id="{655d5472-bad2-0dae-367a-9d46ba18600b}">
           <p14:sldIdLst>
             <p14:sldId id="262"/>
             <p14:sldId id="263"/>
@@ -158,7 +158,7 @@
             <p14:sldId id="267"/>
           </p14:sldIdLst>
         </p14:section>
-        <p14:section name="Routes" id="{f150daaa-0e94-ccbe-061f-b8dc681d9be1}">
+        <p14:section name="Routes" id="{bf883439-19d7-cb08-5429-619539ecb24c}">
           <p14:sldIdLst>
             <p14:sldId id="268"/>
             <p14:sldId id="269"/>
@@ -166,12 +166,12 @@
             <p14:sldId id="271"/>
           </p14:sldIdLst>
         </p14:section>
-        <p14:section name="Close" id="{e6d2dab3-237f-f711-6066-1fc38fed36bf}">
+        <p14:section name="Close" id="{de82be28-ea03-fef7-018d-677a5879d0e6}">
           <p14:sldIdLst>
             <p14:sldId id="272"/>
           </p14:sldIdLst>
         </p14:section>
-        <p14:section name="Answers" id="{7874d9e5-1281-219d-31f1-d2c2c9cbdbfc}">
+        <p14:section name="Answers" id="{cf5bf26a-e512-fcf8-9560-4c1403a256fc}">
           <p14:sldIdLst>
             <p14:sldId id="273"/>
             <p14:sldId id="274"/>
@@ -1331,7 +1331,7 @@
               <a:rPr lang="en-US" dirty="0"/>
               <a:t>Exit ticket — individual, silent, on a slip or mini-whiteboard. Recall before help: no notes, no lanes, no hints. Collect before pupils leave.
 Question: On the story mountain, what is the crisis?
-Answer: A   The major event that everything in the story leads up to. The crisis is the peak of the mountain. The conflict climbs towards it, and the resolution comes down from it.
+Answer: B   The major event that everything in the story leads up to. The crisis is the peak of the mountain. The conflict climbs towards it, and the resolution comes down from it.
 Source of this question: gate item 1 re-asked (options rotated) — this chapter has no third quick-check module.
 The ebook also holds task 3, "Write the Gothic scene", for homework or the next lesson's do now.
 Sort the slips: correct → ready to move on; incorrect → start next lesson in the pre-teach group, with the read-along and the Support lane. Same destination next time.</a:t>
@@ -1605,8 +1605,8 @@
             <a:r>
               <a:rPr lang="en-US" dirty="0"/>
               <a:t>Do now — retrieval. Silent, no notes, no help: recall comes before any support. Give about four minutes.
-1. On the story mountain, what is the crisis?  →  B   The major event that everything in the story leads up to
-2. How long is the end-of-unit assessment, and how long should you spend planning?  →  A   45 minutes, with 5 minutes planning
+1. On the story mountain, what is the crisis?  →  C   The major event that everything in the story leads up to
+2. How long is the end-of-unit assessment, and how long should you spend planning?  →  D   45 minutes, with 5 minutes planning
 3. The short summary on the back of a book that tries to make you read it is called the ___.  →  blurb
 Circulate: who gets 3/3 (Stretch route), 2/3 (Core), 0–1 (Support)? Use this to route pupils later in the lesson.</a:t>
             </a:r>
@@ -1697,7 +1697,7 @@
             <a:r>
               <a:rPr lang="en-US" dirty="0"/>
               <a:t>Answers — exit ticket: Exit ticket. Reveal the answer; pupils mark their own work in a different colour, then read the "why" together. Same destination for every lane, so one answer serves the whole class.
-Answer: A   The major event that everything in the story leads up to
+Answer: B   The major event that everything in the story leads up to
 Why: The crisis is the peak of the mountain. The conflict climbs towards it, and the resolution comes down from it.
 Ask a Support pupil to explain one step, and a Stretch pupil to share their extension.</a:t>
             </a:r>
@@ -1788,8 +1788,8 @@
             <a:r>
               <a:rPr lang="en-US" dirty="0"/>
               <a:t>Answers — pupils mark their own in a different colour, then hands up for 3/3, 2/3, 1/3.
-1. B   The major event that everything in the story leads up to. The crisis is the peak of the mountain. The conflict climbs towards it, and the resolution comes down from it.
-2. A   45 minutes, with 5 minutes planning. You have 45 minutes in total. The top tip is to spend the first five planning, which leaves 40 to write.
+1. C   The major event that everything in the story leads up to. The crisis is the peak of the mountain. The conflict climbs towards it, and the resolution comes down from it.
+2. D   45 minutes, with 5 minutes planning. You have 45 minutes in total. The top tip is to spend the first five planning, which leaves 40 to write.
 3. blurb. A blurb suggests the genre, gives key information and entices the reader without giving the ending away.
 Say the route each score points to: 3/3 Stretch, 2/3 Core, 0–1 Support. Pupils may choose to move up.</a:t>
             </a:r>
@@ -10366,7 +10366,7 @@
                 <a:ea typeface="Calibri" pitchFamily="34" charset="-122"/>
                 <a:cs typeface="Calibri" pitchFamily="34" charset="-120"/>
               </a:rPr>
-              <a:t>The major event that everything in the story leads up to</a:t>
+              <a:t>The feedback your partner gives you</a:t>
             </a:r>
             <a:endParaRPr lang="en-US" sz="2400" dirty="0"/>
           </a:p>
@@ -10403,7 +10403,7 @@
                 <a:ea typeface="Calibri" pitchFamily="34" charset="-122"/>
                 <a:cs typeface="Calibri" pitchFamily="34" charset="-120"/>
               </a:rPr>
-              <a:t>The last sentence of the story</a:t>
+              <a:t>The major event that everything in the story leads up to</a:t>
             </a:r>
             <a:endParaRPr lang="en-US" sz="2400" dirty="0"/>
           </a:p>
@@ -10440,7 +10440,7 @@
                 <a:ea typeface="Calibri" pitchFamily="34" charset="-122"/>
                 <a:cs typeface="Calibri" pitchFamily="34" charset="-120"/>
               </a:rPr>
-              <a:t>The feedback your partner gives you</a:t>
+              <a:t>The last sentence of the story</a:t>
             </a:r>
             <a:endParaRPr lang="en-US" sz="2400" dirty="0"/>
           </a:p>
@@ -12208,7 +12208,7 @@
                 <a:ea typeface="Calibri" pitchFamily="34" charset="-122"/>
                 <a:cs typeface="Calibri" pitchFamily="34" charset="-120"/>
               </a:rPr>
-              <a:t>The major event that everything in the story leads up to</a:t>
+              <a:t>The feedback your partner gives you</a:t>
             </a:r>
             <a:endParaRPr lang="en-US" sz="1800" dirty="0"/>
           </a:p>
@@ -12245,7 +12245,7 @@
                 <a:ea typeface="Calibri" pitchFamily="34" charset="-122"/>
                 <a:cs typeface="Calibri" pitchFamily="34" charset="-120"/>
               </a:rPr>
-              <a:t>The last sentence of the story</a:t>
+              <a:t>The major event that everything in the story leads up to</a:t>
             </a:r>
             <a:endParaRPr lang="en-US" sz="1800" dirty="0"/>
           </a:p>
@@ -12282,7 +12282,7 @@
                 <a:ea typeface="Calibri" pitchFamily="34" charset="-122"/>
                 <a:cs typeface="Calibri" pitchFamily="34" charset="-120"/>
               </a:rPr>
-              <a:t>The feedback your partner gives you</a:t>
+              <a:t>The last sentence of the story</a:t>
             </a:r>
             <a:endParaRPr lang="en-US" sz="1800" dirty="0"/>
           </a:p>
@@ -12486,7 +12486,7 @@
                 <a:ea typeface="Calibri" pitchFamily="34" charset="-122"/>
                 <a:cs typeface="Calibri" pitchFamily="34" charset="-120"/>
               </a:rPr>
-              <a:t>45 minutes, with 5 minutes planning</a:t>
+              <a:t>60 minutes, with 20 minutes planning</a:t>
             </a:r>
             <a:endParaRPr lang="en-US" sz="1800" dirty="0"/>
           </a:p>
@@ -12523,7 +12523,7 @@
                 <a:ea typeface="Calibri" pitchFamily="34" charset="-122"/>
                 <a:cs typeface="Calibri" pitchFamily="34" charset="-120"/>
               </a:rPr>
-              <a:t>60 minutes, with 20 minutes planning</a:t>
+              <a:t>45 minutes, with 25 minutes planning</a:t>
             </a:r>
             <a:endParaRPr lang="en-US" sz="1800" dirty="0"/>
           </a:p>
@@ -12597,7 +12597,7 @@
                 <a:ea typeface="Calibri" pitchFamily="34" charset="-122"/>
                 <a:cs typeface="Calibri" pitchFamily="34" charset="-120"/>
               </a:rPr>
-              <a:t>45 minutes, with 25 minutes planning</a:t>
+              <a:t>45 minutes, with 5 minutes planning</a:t>
             </a:r>
             <a:endParaRPr lang="en-US" sz="1800" dirty="0"/>
           </a:p>
@@ -13134,7 +13134,7 @@
                 <a:ea typeface="Cambria" pitchFamily="34" charset="-122"/>
                 <a:cs typeface="Cambria" pitchFamily="34" charset="-120"/>
               </a:rPr>
-              <a:t>A   The major event that everything in the story leads up to</a:t>
+              <a:t>B   The major event that everything in the story leads up to</a:t>
             </a:r>
             <a:endParaRPr lang="en-US" sz="1800" dirty="0"/>
           </a:p>
@@ -13655,7 +13655,7 @@
                 <a:ea typeface="Calibri" pitchFamily="34" charset="-122"/>
                 <a:cs typeface="Calibri" pitchFamily="34" charset="-120"/>
               </a:rPr>
-              <a:t>B   The major event that everything in the story leads up to</a:t>
+              <a:t>C   The major event that everything in the story leads up to</a:t>
             </a:r>
             <a:endParaRPr lang="en-US" sz="2200" dirty="0"/>
           </a:p>
@@ -13905,7 +13905,7 @@
                 <a:ea typeface="Calibri" pitchFamily="34" charset="-122"/>
                 <a:cs typeface="Calibri" pitchFamily="34" charset="-120"/>
               </a:rPr>
-              <a:t>A   45 minutes, with 5 minutes planning</a:t>
+              <a:t>D   45 minutes, with 5 minutes planning</a:t>
             </a:r>
             <a:endParaRPr lang="en-US" sz="2200" dirty="0"/>
           </a:p>

--- a/decks/englit-gothic/englit-gothic_ch6_planning-and-assessment.pptx
+++ b/decks/englit-gothic/englit-gothic_ch6_planning-and-assessment.pptx
@@ -126,29 +126,29 @@
   <p:extLst>
     <p:ext uri="{521415D9-36F7-43E2-AB2F-B90AF26B5E84}">
       <p14:sectionLst xmlns:p14="http://schemas.microsoft.com/office/powerpoint/2010/main">
-        <p14:section name="Opening" id="{5d0bd56a-423f-652d-60e7-70dca681fd76}">
+        <p14:section name="Opening" id="{38453615-d9be-7c4c-12b9-dee4b245bbf7}">
           <p14:sldIdLst>
             <p14:sldId id="256"/>
           </p14:sldIdLst>
         </p14:section>
-        <p14:section name="Gate" id="{b4d3a83a-86e3-5d0a-cbb9-e643b10e0e98}">
+        <p14:section name="Gate" id="{cee2b026-9d00-dea4-5f71-1a8660b7077c}">
           <p14:sldIdLst>
             <p14:sldId id="257"/>
             <p14:sldId id="258"/>
           </p14:sldIdLst>
         </p14:section>
-        <p14:section name="Pre-teach" id="{07a07f03-9947-05ed-6037-95e326befc72}">
+        <p14:section name="Pre-teach" id="{12c6ab41-2286-98f6-369e-5757921f6557}">
           <p14:sldIdLst>
             <p14:sldId id="259"/>
           </p14:sldIdLst>
         </p14:section>
-        <p14:section name="Read-along" id="{a470e88c-fb2b-5f69-7980-17862ed2fc45}">
+        <p14:section name="Read-along" id="{c760e758-ebbe-70b9-815a-132c8aa3f329}">
           <p14:sldIdLst>
             <p14:sldId id="260"/>
             <p14:sldId id="261"/>
           </p14:sldIdLst>
         </p14:section>
-        <p14:section name="Teach" id="{655d5472-bad2-0dae-367a-9d46ba18600b}">
+        <p14:section name="Teach" id="{e37686ce-ee1d-d21c-69f8-e90769fe104c}">
           <p14:sldIdLst>
             <p14:sldId id="262"/>
             <p14:sldId id="263"/>
@@ -158,7 +158,7 @@
             <p14:sldId id="267"/>
           </p14:sldIdLst>
         </p14:section>
-        <p14:section name="Routes" id="{bf883439-19d7-cb08-5429-619539ecb24c}">
+        <p14:section name="Routes" id="{44050c4c-09e4-89bf-1548-a52ca9c35966}">
           <p14:sldIdLst>
             <p14:sldId id="268"/>
             <p14:sldId id="269"/>
@@ -166,12 +166,12 @@
             <p14:sldId id="271"/>
           </p14:sldIdLst>
         </p14:section>
-        <p14:section name="Close" id="{de82be28-ea03-fef7-018d-677a5879d0e6}">
+        <p14:section name="Close" id="{6a6cd39d-bd84-36e7-0838-9ad8372a42c4}">
           <p14:sldIdLst>
             <p14:sldId id="272"/>
           </p14:sldIdLst>
         </p14:section>
-        <p14:section name="Answers" id="{cf5bf26a-e512-fcf8-9560-4c1403a256fc}">
+        <p14:section name="Answers" id="{3ff92de6-08f9-800f-1375-d24e34c840e5}">
           <p14:sldIdLst>
             <p14:sldId id="273"/>
             <p14:sldId id="274"/>
